--- a/Foundation_F2/Workshop/F2-W01_Apply_Workshop_L01-L02_First_Day_at_the_Arabic_Club.pptx
+++ b/Foundation_F2/Workshop/F2-W01_Apply_Workshop_L01-L02_First_Day_at_the_Arabic_Club.pptx
@@ -7436,7 +7436,7 @@
                 <a:latin typeface="Calibri" pitchFamily="34" charset="0"/>
                 <a:cs typeface="Amiri" pitchFamily="2" charset="-78"/>
               </a:rPr>
-              <a:t>Odd numbers come from F2-L01, even numbers from F2-L02. Core: a full sentence from the starter. Develop: add the “more” part. Stretch: link two answers with </a:t>
+              <a:t>Odd numbers come from F2-L01, even numbers from F2-L02. Core: a full sentence from the starter. Develop: add the “more” part. Stretch: link two answers with ‏</a:t>
             </a:r>
             <a:pPr algn="l" indent="0" marL="0">
               <a:buNone/>
@@ -7463,7 +7463,7 @@
                 <a:latin typeface="Calibri" pitchFamily="34" charset="0"/>
                 <a:cs typeface="Amiri" pitchFamily="2" charset="-78"/>
               </a:rPr>
-              <a:t>, </a:t>
+              <a:t>‏, ‏</a:t>
             </a:r>
             <a:pPr algn="l" indent="0" marL="0">
               <a:buNone/>
@@ -7490,7 +7490,7 @@
                 <a:latin typeface="Calibri" pitchFamily="34" charset="0"/>
                 <a:cs typeface="Amiri" pitchFamily="2" charset="-78"/>
               </a:rPr>
-              <a:t> or </a:t>
+              <a:t>‏ or ‏</a:t>
             </a:r>
             <a:pPr algn="l" indent="0" marL="0">
               <a:buNone/>
@@ -7517,7 +7517,7 @@
                 <a:latin typeface="Calibri" pitchFamily="34" charset="0"/>
                 <a:cs typeface="Amiri" pitchFamily="2" charset="-78"/>
               </a:rPr>
-              <a:t>. Swap after each question.</a:t>
+              <a:t>‏. Swap after each question.</a:t>
             </a:r>
             <a:endParaRPr lang="en-US" sz="1100" dirty="0"/>
           </a:p>
@@ -10840,7 +10840,7 @@
                 <a:latin typeface="Calibri" pitchFamily="34" charset="0"/>
                 <a:cs typeface="Amiri" pitchFamily="2" charset="-78"/>
               </a:rPr>
-              <a:t>Add a friend: </a:t>
+              <a:t>Add a friend: ‏</a:t>
             </a:r>
             <a:pPr algn="l" indent="0" marL="0">
               <a:buNone/>
@@ -10867,7 +10867,7 @@
                 <a:latin typeface="Calibri" pitchFamily="34" charset="0"/>
                 <a:cs typeface="Amiri" pitchFamily="2" charset="-78"/>
               </a:rPr>
-              <a:t> … or </a:t>
+              <a:t> …‏ or ‏</a:t>
             </a:r>
             <a:pPr algn="l" indent="0" marL="0">
               <a:buNone/>
@@ -10894,7 +10894,7 @@
                 <a:latin typeface="Calibri" pitchFamily="34" charset="0"/>
                 <a:cs typeface="Amiri" pitchFamily="2" charset="-78"/>
               </a:rPr>
-              <a:t> …</a:t>
+              <a:t> …‏</a:t>
             </a:r>
             <a:endParaRPr lang="en-US" sz="1150" dirty="0"/>
           </a:p>
@@ -11031,7 +11031,7 @@
                 <a:latin typeface="Calibri" pitchFamily="34" charset="0"/>
                 <a:cs typeface="Amiri" pitchFamily="2" charset="-78"/>
               </a:rPr>
-              <a:t>Introduce a boy AND a girl, ask the class </a:t>
+              <a:t>Introduce a boy AND a girl, ask the class ‏</a:t>
             </a:r>
             <a:pPr algn="l" indent="0" marL="0">
               <a:buNone/>
@@ -11058,7 +11058,7 @@
                 <a:latin typeface="Calibri" pitchFamily="34" charset="0"/>
                 <a:cs typeface="Amiri" pitchFamily="2" charset="-78"/>
               </a:rPr>
-              <a:t> and use the long greeting.</a:t>
+              <a:t>‏ and use the long greeting.</a:t>
             </a:r>
             <a:endParaRPr lang="en-US" sz="1150" dirty="0"/>
           </a:p>
@@ -17446,7 +17446,7 @@
                 <a:latin typeface="Calibri" pitchFamily="34" charset="0"/>
                 <a:cs typeface="Amiri" pitchFamily="2" charset="-78"/>
               </a:rPr>
-              <a:t>The reply to </a:t>
+              <a:t>The reply to ‏</a:t>
             </a:r>
             <a:pPr algn="l" indent="0" marL="0">
               <a:buNone/>
@@ -17473,7 +17473,7 @@
                 <a:latin typeface="Calibri" pitchFamily="34" charset="0"/>
                 <a:cs typeface="Amiri" pitchFamily="2" charset="-78"/>
               </a:rPr>
-              <a:t> is </a:t>
+              <a:t>‏ is ‏</a:t>
             </a:r>
             <a:pPr algn="l" indent="0" marL="0">
               <a:buNone/>
@@ -17500,7 +17500,7 @@
                 <a:latin typeface="Calibri" pitchFamily="34" charset="0"/>
                 <a:cs typeface="Amiri" pitchFamily="2" charset="-78"/>
               </a:rPr>
-              <a:t>.</a:t>
+              <a:t>‏.</a:t>
             </a:r>
             <a:endParaRPr lang="en-US" sz="1150" dirty="0"/>
           </a:p>
@@ -17711,7 +17711,7 @@
                 <a:latin typeface="Calibri" pitchFamily="34" charset="0"/>
                 <a:cs typeface="Amiri" pitchFamily="2" charset="-78"/>
               </a:rPr>
-              <a:t>To a girl: </a:t>
+              <a:t>To a girl: ‏</a:t>
             </a:r>
             <a:pPr algn="l" indent="0" marL="0">
               <a:buNone/>
@@ -17738,7 +17738,7 @@
                 <a:latin typeface="Calibri" pitchFamily="34" charset="0"/>
                 <a:cs typeface="Amiri" pitchFamily="2" charset="-78"/>
               </a:rPr>
-              <a:t> (-ki).</a:t>
+              <a:t>‏ (-ki).</a:t>
             </a:r>
             <a:endParaRPr lang="en-US" sz="1150" dirty="0"/>
           </a:p>
@@ -17949,7 +17949,7 @@
                 <a:latin typeface="Calibri" pitchFamily="34" charset="0"/>
                 <a:cs typeface="Amiri" pitchFamily="2" charset="-78"/>
               </a:rPr>
-              <a:t>To a girl: </a:t>
+              <a:t>To a girl: ‏</a:t>
             </a:r>
             <a:pPr algn="l" indent="0" marL="0">
               <a:buNone/>
@@ -17976,7 +17976,7 @@
                 <a:latin typeface="Calibri" pitchFamily="34" charset="0"/>
                 <a:cs typeface="Amiri" pitchFamily="2" charset="-78"/>
               </a:rPr>
-              <a:t> (-ki).</a:t>
+              <a:t>‏ (-ki).</a:t>
             </a:r>
             <a:endParaRPr lang="en-US" sz="1150" dirty="0"/>
           </a:p>
@@ -20176,7 +20176,7 @@
                 <a:latin typeface="Calibri" pitchFamily="34" charset="0"/>
                 <a:cs typeface="Amiri" pitchFamily="2" charset="-78"/>
               </a:rPr>
-              <a:t>☐  At least one </a:t>
+              <a:t>☐  At least one ‏</a:t>
             </a:r>
             <a:pPr algn="l" indent="0" marL="0">
               <a:buNone/>
@@ -20203,7 +20203,7 @@
                 <a:latin typeface="Calibri" pitchFamily="34" charset="0"/>
                 <a:cs typeface="Amiri" pitchFamily="2" charset="-78"/>
               </a:rPr>
-              <a:t> and one </a:t>
+              <a:t>‏ and one ‏</a:t>
             </a:r>
             <a:pPr algn="l" indent="0" marL="0">
               <a:buNone/>
@@ -20230,7 +20230,7 @@
                 <a:latin typeface="Calibri" pitchFamily="34" charset="0"/>
                 <a:cs typeface="Amiri" pitchFamily="2" charset="-78"/>
               </a:rPr>
-              <a:t> (Develop).</a:t>
+              <a:t>‏ (Develop).</a:t>
             </a:r>
             <a:endParaRPr lang="en-US" sz="1200" dirty="0"/>
           </a:p>
@@ -23778,7 +23778,7 @@
                 <a:latin typeface="Calibri" pitchFamily="34" charset="0"/>
                 <a:cs typeface="Amiri" pitchFamily="2" charset="-78"/>
               </a:rPr>
-              <a:t>use </a:t>
+              <a:t>use ‏</a:t>
             </a:r>
             <a:pPr algn="l" indent="0" marL="0">
               <a:buNone/>
@@ -23805,7 +23805,7 @@
                 <a:latin typeface="Calibri" pitchFamily="34" charset="0"/>
                 <a:cs typeface="Amiri" pitchFamily="2" charset="-78"/>
               </a:rPr>
-              <a:t> and </a:t>
+              <a:t>‏ and ‏</a:t>
             </a:r>
             <a:pPr algn="l" indent="0" marL="0">
               <a:buNone/>
@@ -23832,7 +23832,7 @@
                 <a:latin typeface="Calibri" pitchFamily="34" charset="0"/>
                 <a:cs typeface="Amiri" pitchFamily="2" charset="-78"/>
               </a:rPr>
-              <a:t>?</a:t>
+              <a:t>‏?</a:t>
             </a:r>
             <a:endParaRPr lang="en-US" sz="1100" dirty="0"/>
           </a:p>
@@ -23991,7 +23991,7 @@
                 <a:latin typeface="Calibri" pitchFamily="34" charset="0"/>
                 <a:cs typeface="Amiri" pitchFamily="2" charset="-78"/>
               </a:rPr>
-              <a:t>use linking words (</a:t>
+              <a:t>use linking words (‏</a:t>
             </a:r>
             <a:pPr algn="l" indent="0" marL="0">
               <a:buNone/>
@@ -24099,7 +24099,7 @@
                 <a:latin typeface="Calibri" pitchFamily="34" charset="0"/>
                 <a:cs typeface="Amiri" pitchFamily="2" charset="-78"/>
               </a:rPr>
-              <a:t>)?</a:t>
+              <a:t>‏)?</a:t>
             </a:r>
             <a:endParaRPr lang="en-US" sz="1100" dirty="0"/>
           </a:p>
@@ -28045,7 +28045,7 @@
                 <a:latin typeface="Calibri" pitchFamily="34" charset="0"/>
                 <a:cs typeface="Amiri" pitchFamily="2" charset="-78"/>
               </a:rPr>
-              <a:t>I added reasons (</a:t>
+              <a:t>I added reasons (‏</a:t>
             </a:r>
             <a:pPr algn="l" indent="0" marL="0">
               <a:buNone/>
@@ -28072,7 +28072,7 @@
                 <a:latin typeface="Calibri" pitchFamily="34" charset="0"/>
                 <a:cs typeface="Amiri" pitchFamily="2" charset="-78"/>
               </a:rPr>
-              <a:t>) and extra details without frames.</a:t>
+              <a:t>‏) and extra details without frames.</a:t>
             </a:r>
             <a:endParaRPr lang="en-US" sz="1300" dirty="0"/>
           </a:p>
@@ -32200,7 +32200,7 @@
                 <a:latin typeface="Calibri" pitchFamily="34" charset="0"/>
                 <a:cs typeface="Amiri" pitchFamily="2" charset="-78"/>
               </a:rPr>
-              <a:t>☐  Add a reason (</a:t>
+              <a:t>☐  Add a reason (‏</a:t>
             </a:r>
             <a:pPr algn="l" indent="0" marL="0">
               <a:buNone/>
@@ -32227,7 +32227,7 @@
                 <a:latin typeface="Calibri" pitchFamily="34" charset="0"/>
                 <a:cs typeface="Amiri" pitchFamily="2" charset="-78"/>
               </a:rPr>
-              <a:t>) and an extra detail to every point.</a:t>
+              <a:t>‏) and an extra detail to every point.</a:t>
             </a:r>
             <a:endParaRPr lang="en-US" sz="1300" dirty="0"/>
           </a:p>
@@ -33748,7 +33748,7 @@
                 <a:latin typeface="Calibri" pitchFamily="34" charset="0"/>
                 <a:cs typeface="Amiri" pitchFamily="2" charset="-78"/>
               </a:rPr>
-              <a:t>Join a word from each lesson in one sentence with </a:t>
+              <a:t>Join a word from each lesson in one sentence with ‏</a:t>
             </a:r>
             <a:pPr algn="l" indent="0" marL="0">
               <a:buNone/>
@@ -33775,7 +33775,7 @@
                 <a:latin typeface="Calibri" pitchFamily="34" charset="0"/>
                 <a:cs typeface="Amiri" pitchFamily="2" charset="-78"/>
               </a:rPr>
-              <a:t> or </a:t>
+              <a:t>‏ or ‏</a:t>
             </a:r>
             <a:pPr algn="l" indent="0" marL="0">
               <a:buNone/>
@@ -33802,7 +33802,7 @@
                 <a:latin typeface="Calibri" pitchFamily="34" charset="0"/>
                 <a:cs typeface="Amiri" pitchFamily="2" charset="-78"/>
               </a:rPr>
-              <a:t>.</a:t>
+              <a:t>‏.</a:t>
             </a:r>
             <a:endParaRPr lang="en-US" sz="1150" dirty="0"/>
           </a:p>
@@ -36290,6 +36290,19 @@
               <a:buNone/>
             </a:pPr>
             <a:r>
+              <a:rPr lang="en-US" sz="1000" i="1" dirty="0">
+                <a:solidFill>
+                  <a:srgbClr val="8A6D1E"/>
+                </a:solidFill>
+                <a:latin typeface="Calibri" pitchFamily="34" charset="0"/>
+                <a:cs typeface="Amiri" pitchFamily="2" charset="-78"/>
+              </a:rPr>
+              <a:t>‏</a:t>
+            </a:r>
+            <a:pPr algn="l" indent="0" marL="0">
+              <a:buNone/>
+            </a:pPr>
+            <a:r>
               <a:rPr lang="ar-SA" altLang="en-US" sz="1300" dirty="0">
                 <a:solidFill>
                   <a:srgbClr val="8A6D1E"/>
@@ -36311,7 +36324,7 @@
                 <a:latin typeface="Calibri" pitchFamily="34" charset="0"/>
                 <a:cs typeface="Amiri" pitchFamily="2" charset="-78"/>
               </a:rPr>
-              <a:t> can stand alone.</a:t>
+              <a:t>‏ can stand alone.</a:t>
             </a:r>
             <a:endParaRPr lang="en-US" sz="1000" dirty="0"/>
           </a:p>
@@ -38236,7 +38249,7 @@
                 <a:latin typeface="Calibri" pitchFamily="34" charset="0"/>
                 <a:cs typeface="Amiri" pitchFamily="2" charset="-78"/>
               </a:rPr>
-              <a:t>Stretch: </a:t>
+              <a:t>Stretch: ‏</a:t>
             </a:r>
             <a:pPr algn="l" indent="0" marL="0">
               <a:buNone/>
@@ -38251,6 +38264,19 @@
                 <a:cs typeface="Amiri" pitchFamily="2" charset="-78"/>
               </a:rPr>
               <a:t>تَشَرَّفْتُ بِلِقَائِكَ / بِلِقَائِكِ</a:t>
+            </a:r>
+            <a:pPr algn="l" indent="0" marL="0">
+              <a:buNone/>
+            </a:pPr>
+            <a:r>
+              <a:rPr lang="en-US" sz="1000" i="1" dirty="0">
+                <a:solidFill>
+                  <a:srgbClr val="8A6D1E"/>
+                </a:solidFill>
+                <a:latin typeface="Calibri" pitchFamily="34" charset="0"/>
+                <a:cs typeface="Amiri" pitchFamily="2" charset="-78"/>
+              </a:rPr>
+              <a:t>‏</a:t>
             </a:r>
             <a:endParaRPr lang="en-US" sz="1000" dirty="0"/>
           </a:p>
@@ -39468,7 +39494,7 @@
                 <a:latin typeface="Calibri" pitchFamily="34" charset="0"/>
                 <a:cs typeface="Amiri" pitchFamily="2" charset="-78"/>
               </a:rPr>
-              <a:t>Ask them: </a:t>
+              <a:t>Ask them: ‏</a:t>
             </a:r>
             <a:pPr algn="l" indent="0" marL="0">
               <a:buNone/>
@@ -39483,6 +39509,19 @@
                 <a:cs typeface="Amiri" pitchFamily="2" charset="-78"/>
               </a:rPr>
               <a:t>مَا اسْمُكِ؟</a:t>
+            </a:r>
+            <a:pPr algn="l" indent="0" marL="0">
+              <a:buNone/>
+            </a:pPr>
+            <a:r>
+              <a:rPr lang="en-US" sz="1000" i="1" dirty="0">
+                <a:solidFill>
+                  <a:srgbClr val="8A6D1E"/>
+                </a:solidFill>
+                <a:latin typeface="Calibri" pitchFamily="34" charset="0"/>
+                <a:cs typeface="Amiri" pitchFamily="2" charset="-78"/>
+              </a:rPr>
+              <a:t>‏</a:t>
             </a:r>
             <a:endParaRPr lang="en-US" sz="1000" dirty="0"/>
           </a:p>
